--- a/PPTs/Lecture 3 - Links Exercises.pptx
+++ b/PPTs/Lecture 3 - Links Exercises.pptx
@@ -9,7 +9,7 @@
   </p:notesMasterIdLst>
   <p:sldIdLst>
     <p:sldId id="257" r:id="rId2"/>
-    <p:sldId id="1004" r:id="rId3"/>
+    <p:sldId id="1280" r:id="rId3"/>
     <p:sldId id="276" r:id="rId4"/>
     <p:sldId id="1269" r:id="rId5"/>
     <p:sldId id="1271" r:id="rId6"/>
@@ -284,21 +284,37 @@
 </p:presentation>
 </file>
 
+<file path=ppt/revisionInfo.xml><?xml version="1.0" encoding="utf-8"?>
+<p1510:revInfo xmlns:a="http://schemas.openxmlformats.org/drawingml/2006/main" xmlns:r="http://schemas.openxmlformats.org/officeDocument/2006/relationships" xmlns:p1510="http://schemas.microsoft.com/office/powerpoint/2015/10/main">
+  <p1510:revLst>
+    <p1510:client id="{8EE6CA2C-5645-4204-A978-87079F8C940A}" v="1" dt="2026-02-04T00:23:07.274"/>
+  </p1510:revLst>
+</p1510:revInfo>
+</file>
+
 <file path=ppt/changesInfos/changesInfo1.xml><?xml version="1.0" encoding="utf-8"?>
 <pc:chgInfo xmlns:a="http://schemas.openxmlformats.org/drawingml/2006/main" xmlns:r="http://schemas.openxmlformats.org/officeDocument/2006/relationships" xmlns:ac="http://schemas.microsoft.com/office/drawing/2013/main/command" xmlns:pc="http://schemas.microsoft.com/office/powerpoint/2013/main/command">
   <pc:docChgLst>
     <pc:chgData name="Zonghua Gu" userId="9a7e1853e1951ef5" providerId="LiveId" clId="{CF1FAA12-072C-4ED5-BA76-0FFFAEFDB88A}"/>
     <pc:docChg chg="undo custSel addSld delSld modSld">
-      <pc:chgData name="Zonghua Gu" userId="9a7e1853e1951ef5" providerId="LiveId" clId="{CF1FAA12-072C-4ED5-BA76-0FFFAEFDB88A}" dt="2026-01-31T21:35:13.647" v="8" actId="47"/>
+      <pc:chgData name="Zonghua Gu" userId="9a7e1853e1951ef5" providerId="LiveId" clId="{CF1FAA12-072C-4ED5-BA76-0FFFAEFDB88A}" dt="2026-02-04T00:23:22.036" v="11" actId="20577"/>
       <pc:docMkLst>
         <pc:docMk/>
       </pc:docMkLst>
       <pc:sldChg chg="modSp mod">
-        <pc:chgData name="Zonghua Gu" userId="9a7e1853e1951ef5" providerId="LiveId" clId="{CF1FAA12-072C-4ED5-BA76-0FFFAEFDB88A}" dt="2026-01-31T21:34:36.195" v="0" actId="20577"/>
+        <pc:chgData name="Zonghua Gu" userId="9a7e1853e1951ef5" providerId="LiveId" clId="{CF1FAA12-072C-4ED5-BA76-0FFFAEFDB88A}" dt="2026-02-04T00:23:22.036" v="11" actId="20577"/>
         <pc:sldMkLst>
           <pc:docMk/>
           <pc:sldMk cId="0" sldId="257"/>
         </pc:sldMkLst>
+        <pc:spChg chg="mod">
+          <ac:chgData name="Zonghua Gu" userId="9a7e1853e1951ef5" providerId="LiveId" clId="{CF1FAA12-072C-4ED5-BA76-0FFFAEFDB88A}" dt="2026-02-04T00:23:22.036" v="11" actId="20577"/>
+          <ac:spMkLst>
+            <pc:docMk/>
+            <pc:sldMk cId="0" sldId="257"/>
+            <ac:spMk id="167" creationId="{00000000-0000-0000-0000-000000000000}"/>
+          </ac:spMkLst>
+        </pc:spChg>
         <pc:spChg chg="mod">
           <ac:chgData name="Zonghua Gu" userId="9a7e1853e1951ef5" providerId="LiveId" clId="{CF1FAA12-072C-4ED5-BA76-0FFFAEFDB88A}" dt="2026-01-31T21:34:36.195" v="0" actId="20577"/>
           <ac:spMkLst>
@@ -309,52 +325,17 @@
         </pc:spChg>
       </pc:sldChg>
       <pc:sldChg chg="del">
-        <pc:chgData name="Zonghua Gu" userId="9a7e1853e1951ef5" providerId="LiveId" clId="{CF1FAA12-072C-4ED5-BA76-0FFFAEFDB88A}" dt="2026-01-31T21:34:41.296" v="1" actId="47"/>
+        <pc:chgData name="Zonghua Gu" userId="9a7e1853e1951ef5" providerId="LiveId" clId="{CF1FAA12-072C-4ED5-BA76-0FFFAEFDB88A}" dt="2026-02-04T00:23:08.589" v="10" actId="47"/>
         <pc:sldMkLst>
           <pc:docMk/>
-          <pc:sldMk cId="3467535441" sldId="1268"/>
+          <pc:sldMk cId="453457216" sldId="1004"/>
         </pc:sldMkLst>
       </pc:sldChg>
-      <pc:sldChg chg="del">
-        <pc:chgData name="Zonghua Gu" userId="9a7e1853e1951ef5" providerId="LiveId" clId="{CF1FAA12-072C-4ED5-BA76-0FFFAEFDB88A}" dt="2026-01-31T21:34:42.257" v="2" actId="47"/>
+      <pc:sldChg chg="add">
+        <pc:chgData name="Zonghua Gu" userId="9a7e1853e1951ef5" providerId="LiveId" clId="{CF1FAA12-072C-4ED5-BA76-0FFFAEFDB88A}" dt="2026-02-04T00:23:07.274" v="9"/>
         <pc:sldMkLst>
           <pc:docMk/>
-          <pc:sldMk cId="2009370128" sldId="1270"/>
-        </pc:sldMkLst>
-      </pc:sldChg>
-      <pc:sldChg chg="add del">
-        <pc:chgData name="Zonghua Gu" userId="9a7e1853e1951ef5" providerId="LiveId" clId="{CF1FAA12-072C-4ED5-BA76-0FFFAEFDB88A}" dt="2026-01-31T21:35:11.092" v="7" actId="47"/>
-        <pc:sldMkLst>
-          <pc:docMk/>
-          <pc:sldMk cId="1216499002" sldId="1272"/>
-        </pc:sldMkLst>
-      </pc:sldChg>
-      <pc:sldChg chg="add del">
-        <pc:chgData name="Zonghua Gu" userId="9a7e1853e1951ef5" providerId="LiveId" clId="{CF1FAA12-072C-4ED5-BA76-0FFFAEFDB88A}" dt="2026-01-31T21:35:11.092" v="7" actId="47"/>
-        <pc:sldMkLst>
-          <pc:docMk/>
-          <pc:sldMk cId="1143496153" sldId="1274"/>
-        </pc:sldMkLst>
-      </pc:sldChg>
-      <pc:sldChg chg="del">
-        <pc:chgData name="Zonghua Gu" userId="9a7e1853e1951ef5" providerId="LiveId" clId="{CF1FAA12-072C-4ED5-BA76-0FFFAEFDB88A}" dt="2026-01-31T21:35:11.092" v="7" actId="47"/>
-        <pc:sldMkLst>
-          <pc:docMk/>
-          <pc:sldMk cId="984938217" sldId="1276"/>
-        </pc:sldMkLst>
-      </pc:sldChg>
-      <pc:sldChg chg="del">
-        <pc:chgData name="Zonghua Gu" userId="9a7e1853e1951ef5" providerId="LiveId" clId="{CF1FAA12-072C-4ED5-BA76-0FFFAEFDB88A}" dt="2026-01-31T21:35:11.092" v="7" actId="47"/>
-        <pc:sldMkLst>
-          <pc:docMk/>
-          <pc:sldMk cId="1323721031" sldId="1278"/>
-        </pc:sldMkLst>
-      </pc:sldChg>
-      <pc:sldChg chg="del">
-        <pc:chgData name="Zonghua Gu" userId="9a7e1853e1951ef5" providerId="LiveId" clId="{CF1FAA12-072C-4ED5-BA76-0FFFAEFDB88A}" dt="2026-01-31T21:35:13.647" v="8" actId="47"/>
-        <pc:sldMkLst>
-          <pc:docMk/>
-          <pc:sldMk cId="123181104" sldId="1280"/>
+          <pc:sldMk cId="1252970958" sldId="1280"/>
         </pc:sldMkLst>
       </pc:sldChg>
     </pc:docChg>
@@ -14280,7 +14261,7 @@
               <a:buChar char="•"/>
             </a:pPr>
             <a:r>
-              <a:rPr lang="en" b="1" dirty="0">
+              <a:rPr lang="en" b="1">
                 <a:solidFill>
                   <a:schemeClr val="accent3"/>
                 </a:solidFill>
@@ -14289,36 +14270,6 @@
                 <a:cs typeface="Roboto"/>
               </a:rPr>
               <a:t>Overloaded Links</a:t>
-            </a:r>
-            <a:endParaRPr b="1" dirty="0">
-              <a:solidFill>
-                <a:schemeClr val="accent3"/>
-              </a:solidFill>
-              <a:latin typeface="Roboto"/>
-              <a:ea typeface="Roboto"/>
-              <a:cs typeface="Roboto"/>
-            </a:endParaRPr>
-          </a:p>
-          <a:p>
-            <a:pPr marL="0" lvl="0" indent="0" algn="l" rtl="0">
-              <a:spcBef>
-                <a:spcPts val="600"/>
-              </a:spcBef>
-              <a:spcAft>
-                <a:spcPts val="0"/>
-              </a:spcAft>
-              <a:buNone/>
-            </a:pPr>
-            <a:r>
-              <a:rPr lang="en" b="1" dirty="0">
-                <a:solidFill>
-                  <a:schemeClr val="accent3"/>
-                </a:solidFill>
-                <a:latin typeface="Roboto"/>
-                <a:ea typeface="Roboto"/>
-                <a:cs typeface="Roboto"/>
-              </a:rPr>
-              <a:t>Brief Preview of the Semester</a:t>
             </a:r>
             <a:endParaRPr b="1" dirty="0">
               <a:solidFill>
@@ -17009,7 +16960,7 @@
         </p:nvSpPr>
         <p:spPr>
           <a:xfrm>
-            <a:off x="663961" y="3321886"/>
+            <a:off x="845113" y="3321886"/>
             <a:ext cx="2857500" cy="1379696"/>
           </a:xfrm>
           <a:prstGeom prst="rect">
@@ -17225,8 +17176,8 @@
         </p:nvSpPr>
         <p:spPr bwMode="auto">
           <a:xfrm>
-            <a:off x="0" y="3112300"/>
-            <a:ext cx="2605177" cy="1045538"/>
+            <a:off x="89650" y="3112299"/>
+            <a:ext cx="2864294" cy="1720017"/>
           </a:xfrm>
           <a:prstGeom prst="rect">
             <a:avLst/>
@@ -17237,14 +17188,14 @@
           </a:ln>
           <a:extLst>
             <a:ext uri="{909E8E84-426E-40dd-AFC4-6F175D3DCCD1}">
-              <a14:hiddenFill xmlns="" xmlns:a14="http://schemas.microsoft.com/office/drawing/2010/main">
+              <a14:hiddenFill xmlns:a14="http://schemas.microsoft.com/office/drawing/2010/main" xmlns="">
                 <a:solidFill>
                   <a:srgbClr val="FFFFFF"/>
                 </a:solidFill>
               </a14:hiddenFill>
             </a:ext>
             <a:ext uri="{91240B29-F687-4f45-9708-019B960494DF}">
-              <a14:hiddenLine xmlns="" xmlns:a14="http://schemas.microsoft.com/office/drawing/2010/main" w="9525">
+              <a14:hiddenLine xmlns:a14="http://schemas.microsoft.com/office/drawing/2010/main" xmlns="" w="9525">
                 <a:solidFill>
                   <a:srgbClr val="000000"/>
                 </a:solidFill>
@@ -17292,7 +17243,7 @@
                 <a:ea typeface="ＭＳ Ｐゴシック" charset="0"/>
                 <a:cs typeface="ＭＳ Ｐゴシック" charset="0"/>
               </a:rPr>
-              <a:t>d</a:t>
+              <a:t>t</a:t>
             </a:r>
             <a:r>
               <a:rPr lang="en-US" sz="2100" kern="1200" baseline="-25000" dirty="0" err="1">
@@ -17338,7 +17289,7 @@
                 <a:ea typeface="ＭＳ Ｐゴシック" charset="0"/>
                 <a:cs typeface="ＭＳ Ｐゴシック" charset="0"/>
               </a:rPr>
-              <a:t>time waiting at output link for transmission </a:t>
+              <a:t>time waiting at the output link for transmission </a:t>
             </a:r>
           </a:p>
           <a:p>
@@ -18669,8 +18620,8 @@
         </p:nvSpPr>
         <p:spPr bwMode="auto">
           <a:xfrm>
-            <a:off x="2255932" y="2489717"/>
-            <a:ext cx="4631496" cy="415528"/>
+            <a:off x="2953944" y="2498340"/>
+            <a:ext cx="2605177" cy="415528"/>
           </a:xfrm>
           <a:prstGeom prst="rect">
             <a:avLst/>
@@ -18823,7 +18774,7 @@
                 <a:latin typeface="Calibri" panose="020F0502020204030204"/>
                 <a:cs typeface="+mn-cs"/>
               </a:rPr>
-              <a:t>d</a:t>
+              <a:t>t</a:t>
             </a:r>
             <a:r>
               <a:rPr lang="en-US" altLang="en-US" kern="1200" baseline="-25000" dirty="0" err="1">
@@ -18833,7 +18784,7 @@
                 <a:latin typeface="Calibri" panose="020F0502020204030204"/>
                 <a:cs typeface="+mn-cs"/>
               </a:rPr>
-              <a:t>nodal</a:t>
+              <a:t>total</a:t>
             </a:r>
             <a:r>
               <a:rPr lang="en-US" altLang="en-US" kern="1200" dirty="0">
@@ -18846,24 +18797,24 @@
               <a:t> = </a:t>
             </a:r>
             <a:r>
-              <a:rPr lang="en-US" altLang="en-US" i="1" kern="1200" dirty="0">
+              <a:rPr lang="en-US" altLang="en-US" i="1" kern="1200" dirty="0" err="1">
                 <a:solidFill>
                   <a:srgbClr val="000000"/>
                 </a:solidFill>
                 <a:latin typeface="Calibri" panose="020F0502020204030204"/>
                 <a:cs typeface="+mn-cs"/>
               </a:rPr>
-              <a:t>d</a:t>
+              <a:t>t</a:t>
             </a:r>
             <a:r>
-              <a:rPr lang="en-US" altLang="en-US" kern="1200" baseline="-25000" dirty="0">
+              <a:rPr lang="en-US" altLang="en-US" kern="1200" baseline="-25000" dirty="0" err="1">
                 <a:solidFill>
                   <a:srgbClr val="000000"/>
                 </a:solidFill>
                 <a:latin typeface="Calibri" panose="020F0502020204030204"/>
                 <a:cs typeface="+mn-cs"/>
               </a:rPr>
-              <a:t>queue</a:t>
+              <a:t>q</a:t>
             </a:r>
             <a:r>
               <a:rPr lang="en-US" altLang="en-US" kern="1200" dirty="0">
@@ -18876,24 +18827,24 @@
               <a:t> + </a:t>
             </a:r>
             <a:r>
-              <a:rPr lang="en-US" altLang="en-US" i="1" kern="1200" dirty="0">
+              <a:rPr lang="en-US" altLang="en-US" i="1" kern="1200" dirty="0" err="1">
                 <a:solidFill>
                   <a:srgbClr val="000000"/>
                 </a:solidFill>
                 <a:latin typeface="Calibri" panose="020F0502020204030204"/>
                 <a:cs typeface="+mn-cs"/>
               </a:rPr>
-              <a:t>d</a:t>
+              <a:t>t</a:t>
             </a:r>
             <a:r>
-              <a:rPr lang="en-US" altLang="en-US" kern="1200" baseline="-25000" dirty="0">
+              <a:rPr lang="en-US" altLang="en-US" kern="1200" baseline="-25000" dirty="0" err="1">
                 <a:solidFill>
                   <a:srgbClr val="000000"/>
                 </a:solidFill>
                 <a:latin typeface="Calibri" panose="020F0502020204030204"/>
                 <a:cs typeface="+mn-cs"/>
               </a:rPr>
-              <a:t>trans</a:t>
+              <a:t>tx</a:t>
             </a:r>
             <a:r>
               <a:rPr lang="en-US" altLang="en-US" kern="1200" dirty="0">
@@ -18903,20 +18854,20 @@
                 <a:latin typeface="Calibri" panose="020F0502020204030204"/>
                 <a:cs typeface="+mn-cs"/>
               </a:rPr>
-              <a:t> +  </a:t>
+              <a:t> + </a:t>
             </a:r>
             <a:r>
-              <a:rPr lang="en-US" altLang="en-US" i="1" kern="1200" dirty="0">
+              <a:rPr lang="en-US" altLang="en-US" kern="1200" dirty="0" err="1">
                 <a:solidFill>
                   <a:srgbClr val="000000"/>
                 </a:solidFill>
                 <a:latin typeface="Calibri" panose="020F0502020204030204"/>
                 <a:cs typeface="+mn-cs"/>
               </a:rPr>
-              <a:t>d</a:t>
+              <a:t>t</a:t>
             </a:r>
             <a:r>
-              <a:rPr lang="en-US" altLang="en-US" kern="1200" baseline="-25000" dirty="0">
+              <a:rPr lang="en-US" altLang="en-US" kern="1200" baseline="-25000" dirty="0" err="1">
                 <a:solidFill>
                   <a:srgbClr val="000000"/>
                 </a:solidFill>
@@ -22989,8 +22940,8 @@
         </p:nvSpPr>
         <p:spPr bwMode="auto">
           <a:xfrm>
-            <a:off x="2532391" y="3112300"/>
-            <a:ext cx="3179005" cy="1558528"/>
+            <a:off x="2944822" y="3112299"/>
+            <a:ext cx="2864294" cy="1558528"/>
           </a:xfrm>
           <a:prstGeom prst="rect">
             <a:avLst/>
@@ -23001,14 +22952,14 @@
           </a:ln>
           <a:extLst>
             <a:ext uri="{909E8E84-426E-40dd-AFC4-6F175D3DCCD1}">
-              <a14:hiddenFill xmlns="" xmlns:a14="http://schemas.microsoft.com/office/drawing/2010/main">
+              <a14:hiddenFill xmlns:a14="http://schemas.microsoft.com/office/drawing/2010/main" xmlns="">
                 <a:solidFill>
                   <a:srgbClr val="FFFFFF"/>
                 </a:solidFill>
               </a14:hiddenFill>
             </a:ext>
             <a:ext uri="{91240B29-F687-4f45-9708-019B960494DF}">
-              <a14:hiddenLine xmlns="" xmlns:a14="http://schemas.microsoft.com/office/drawing/2010/main" w="9525">
+              <a14:hiddenLine xmlns:a14="http://schemas.microsoft.com/office/drawing/2010/main" xmlns="" w="9525">
                 <a:solidFill>
                   <a:srgbClr val="000000"/>
                 </a:solidFill>
@@ -23045,7 +22996,7 @@
                 <a:ea typeface="ＭＳ Ｐゴシック" charset="0"/>
                 <a:cs typeface="ＭＳ Ｐゴシック" charset="0"/>
               </a:rPr>
-              <a:t>d</a:t>
+              <a:t>t</a:t>
             </a:r>
             <a:r>
               <a:rPr lang="en-US" sz="2100" kern="1200" baseline="-25000" dirty="0" err="1">
@@ -23123,7 +23074,7 @@
                 <a:ea typeface="ＭＳ Ｐゴシック" charset="0"/>
                 <a:cs typeface="ＭＳ Ｐゴシック" charset="0"/>
               </a:rPr>
-              <a:t>R</a:t>
+              <a:t>B</a:t>
             </a:r>
             <a:r>
               <a:rPr lang="en-US" sz="1800" kern="1200" dirty="0">
@@ -23131,7 +23082,7 @@
                 <a:ea typeface="ＭＳ Ｐゴシック" charset="0"/>
                 <a:cs typeface="ＭＳ Ｐゴシック" charset="0"/>
               </a:rPr>
-              <a:t>: link </a:t>
+              <a:t>: link bandwidth</a:t>
             </a:r>
             <a:r>
               <a:rPr lang="en-US" sz="1800" i="1" kern="1200" dirty="0">
@@ -23139,7 +23090,15 @@
                 <a:ea typeface="ＭＳ Ｐゴシック" charset="0"/>
                 <a:cs typeface="ＭＳ Ｐゴシック" charset="0"/>
               </a:rPr>
-              <a:t>transmission rate (bps)</a:t>
+              <a:t> </a:t>
+            </a:r>
+            <a:r>
+              <a:rPr lang="en-US" sz="1800" kern="1200" dirty="0">
+                <a:latin typeface="Calibri" panose="020F0502020204030204"/>
+                <a:ea typeface="ＭＳ Ｐゴシック" charset="0"/>
+                <a:cs typeface="ＭＳ Ｐゴシック" charset="0"/>
+              </a:rPr>
+              <a:t>(bps)</a:t>
             </a:r>
           </a:p>
           <a:p>
@@ -23158,45 +23117,37 @@
               <a:defRPr/>
             </a:pPr>
             <a:r>
-              <a:rPr lang="en-US" sz="1800" i="1" kern="1200" dirty="0">
-                <a:solidFill>
-                  <a:srgbClr val="CC0000"/>
+              <a:rPr lang="en-US" sz="1800" i="1" kern="1200" dirty="0" err="1">
+                <a:solidFill>
+                  <a:schemeClr val="tx1"/>
                 </a:solidFill>
                 <a:latin typeface="Calibri" panose="020F0502020204030204"/>
                 <a:ea typeface="ＭＳ Ｐゴシック" charset="0"/>
                 <a:cs typeface="ＭＳ Ｐゴシック" charset="0"/>
               </a:rPr>
-              <a:t>d</a:t>
+              <a:t>t</a:t>
             </a:r>
             <a:r>
-              <a:rPr lang="en-US" sz="1800" i="1" kern="1200" baseline="-25000" dirty="0">
-                <a:solidFill>
-                  <a:srgbClr val="CC0000"/>
+              <a:rPr lang="en-US" sz="1800" i="1" kern="1200" baseline="-25000" dirty="0" err="1">
+                <a:solidFill>
+                  <a:schemeClr val="tx1"/>
                 </a:solidFill>
                 <a:latin typeface="Calibri" panose="020F0502020204030204"/>
                 <a:ea typeface="ＭＳ Ｐゴシック" charset="0"/>
                 <a:cs typeface="ＭＳ Ｐゴシック" charset="0"/>
               </a:rPr>
-              <a:t>trans</a:t>
+              <a:t>tx</a:t>
             </a:r>
             <a:r>
               <a:rPr lang="en-US" sz="1800" i="1" kern="1200" dirty="0">
                 <a:solidFill>
-                  <a:srgbClr val="CC0000"/>
+                  <a:schemeClr val="tx1"/>
                 </a:solidFill>
                 <a:latin typeface="Calibri" panose="020F0502020204030204"/>
                 <a:ea typeface="ＭＳ Ｐゴシック" charset="0"/>
                 <a:cs typeface="ＭＳ Ｐゴシック" charset="0"/>
               </a:rPr>
-              <a:t> </a:t>
-            </a:r>
-            <a:r>
-              <a:rPr lang="en-US" sz="1800" i="1" kern="1200" dirty="0">
-                <a:latin typeface="Calibri" panose="020F0502020204030204"/>
-                <a:ea typeface="ＭＳ Ｐゴシック" charset="0"/>
-                <a:cs typeface="ＭＳ Ｐゴシック" charset="0"/>
-              </a:rPr>
-              <a:t>= L/R</a:t>
+              <a:t> = L/B</a:t>
             </a:r>
           </a:p>
         </p:txBody>
@@ -23217,7 +23168,7 @@
         </p:nvSpPr>
         <p:spPr bwMode="auto">
           <a:xfrm>
-            <a:off x="5638611" y="3112300"/>
+            <a:off x="5799994" y="3112299"/>
             <a:ext cx="3433318" cy="1643063"/>
           </a:xfrm>
           <a:prstGeom prst="rect">
@@ -23229,14 +23180,14 @@
           </a:ln>
           <a:extLst>
             <a:ext uri="{909E8E84-426E-40dd-AFC4-6F175D3DCCD1}">
-              <a14:hiddenFill xmlns="" xmlns:a14="http://schemas.microsoft.com/office/drawing/2010/main">
+              <a14:hiddenFill xmlns:a14="http://schemas.microsoft.com/office/drawing/2010/main" xmlns="">
                 <a:solidFill>
                   <a:srgbClr val="FFFFFF"/>
                 </a:solidFill>
               </a14:hiddenFill>
             </a:ext>
             <a:ext uri="{91240B29-F687-4f45-9708-019B960494DF}">
-              <a14:hiddenLine xmlns="" xmlns:a14="http://schemas.microsoft.com/office/drawing/2010/main" w="9525">
+              <a14:hiddenLine xmlns:a14="http://schemas.microsoft.com/office/drawing/2010/main" xmlns="" w="9525">
                 <a:solidFill>
                   <a:srgbClr val="000000"/>
                 </a:solidFill>
@@ -23265,7 +23216,7 @@
               <a:defRPr/>
             </a:pPr>
             <a:r>
-              <a:rPr lang="en-US" sz="2100" i="1" kern="1200" dirty="0">
+              <a:rPr lang="en-US" sz="2100" i="1" kern="1200" dirty="0" err="1">
                 <a:solidFill>
                   <a:srgbClr val="CC0000"/>
                 </a:solidFill>
@@ -23273,10 +23224,10 @@
                 <a:ea typeface="ＭＳ Ｐゴシック" charset="0"/>
                 <a:cs typeface="ＭＳ Ｐゴシック" charset="0"/>
               </a:rPr>
-              <a:t>d</a:t>
+              <a:t>t</a:t>
             </a:r>
             <a:r>
-              <a:rPr lang="en-US" sz="2100" kern="1200" baseline="-25000" dirty="0">
+              <a:rPr lang="en-US" sz="2100" kern="1200" baseline="-25000" dirty="0" err="1">
                 <a:solidFill>
                   <a:srgbClr val="CC0000"/>
                 </a:solidFill>
@@ -23335,7 +23286,7 @@
                 <a:ea typeface="ＭＳ Ｐゴシック" charset="0"/>
                 <a:cs typeface="ＭＳ Ｐゴシック" charset="0"/>
               </a:rPr>
-              <a:t>: length of physical link</a:t>
+              <a:t>: distance of physical link</a:t>
             </a:r>
           </a:p>
           <a:p>
@@ -23367,23 +23318,7 @@
                 <a:ea typeface="ＭＳ Ｐゴシック" charset="0"/>
                 <a:cs typeface="ＭＳ Ｐゴシック" charset="0"/>
               </a:rPr>
-              <a:t>: propagation speed (~2x10</a:t>
-            </a:r>
-            <a:r>
-              <a:rPr lang="en-US" sz="1800" kern="1200" baseline="30000" dirty="0">
-                <a:latin typeface="Calibri" panose="020F0502020204030204"/>
-                <a:ea typeface="ＭＳ Ｐゴシック" charset="0"/>
-                <a:cs typeface="ＭＳ Ｐゴシック" charset="0"/>
-              </a:rPr>
-              <a:t>8</a:t>
-            </a:r>
-            <a:r>
-              <a:rPr lang="en-US" sz="1800" kern="1200" dirty="0">
-                <a:latin typeface="Calibri" panose="020F0502020204030204"/>
-                <a:ea typeface="ＭＳ Ｐゴシック" charset="0"/>
-                <a:cs typeface="ＭＳ Ｐゴシック" charset="0"/>
-              </a:rPr>
-              <a:t> m/sec)</a:t>
+              <a:t>: propagation speed</a:t>
             </a:r>
           </a:p>
           <a:p>
@@ -23402,20 +23337,20 @@
               <a:defRPr/>
             </a:pPr>
             <a:r>
-              <a:rPr lang="en-US" sz="1800" i="1" kern="1200" dirty="0">
-                <a:solidFill>
-                  <a:srgbClr val="CC0000"/>
+              <a:rPr lang="en-US" sz="1800" i="1" kern="1200" dirty="0" err="1">
+                <a:solidFill>
+                  <a:schemeClr val="tx1"/>
                 </a:solidFill>
                 <a:latin typeface="Calibri" panose="020F0502020204030204"/>
                 <a:ea typeface="ＭＳ Ｐゴシック" charset="0"/>
                 <a:cs typeface="ＭＳ Ｐゴシック" charset="0"/>
               </a:rPr>
-              <a:t>d</a:t>
+              <a:t>t</a:t>
             </a:r>
             <a:r>
-              <a:rPr lang="en-US" sz="1800" kern="1200" baseline="-25000" dirty="0">
-                <a:solidFill>
-                  <a:srgbClr val="CC0000"/>
+              <a:rPr lang="en-US" sz="1800" kern="1200" baseline="-25000" dirty="0" err="1">
+                <a:solidFill>
+                  <a:schemeClr val="tx1"/>
                 </a:solidFill>
                 <a:latin typeface="Calibri" panose="020F0502020204030204"/>
                 <a:ea typeface="ＭＳ Ｐゴシック" charset="0"/>
@@ -23425,6 +23360,9 @@
             </a:r>
             <a:r>
               <a:rPr lang="en-US" sz="1800" kern="1200" dirty="0">
+                <a:solidFill>
+                  <a:schemeClr val="tx1"/>
+                </a:solidFill>
                 <a:latin typeface="Calibri" panose="020F0502020204030204"/>
                 <a:ea typeface="ＭＳ Ｐゴシック" charset="0"/>
                 <a:cs typeface="ＭＳ Ｐゴシック" charset="0"/>
@@ -23433,6 +23371,9 @@
             </a:r>
             <a:r>
               <a:rPr lang="en-US" sz="1800" i="1" kern="1200" dirty="0">
+                <a:solidFill>
+                  <a:schemeClr val="tx1"/>
+                </a:solidFill>
                 <a:latin typeface="Calibri" panose="020F0502020204030204"/>
                 <a:ea typeface="ＭＳ Ｐゴシック" charset="0"/>
                 <a:cs typeface="ＭＳ Ｐゴシック" charset="0"/>
@@ -23441,6 +23382,9 @@
             </a:r>
             <a:r>
               <a:rPr lang="en-US" sz="1800" kern="1200" dirty="0">
+                <a:solidFill>
+                  <a:schemeClr val="tx1"/>
+                </a:solidFill>
                 <a:latin typeface="Calibri" panose="020F0502020204030204"/>
                 <a:ea typeface="ＭＳ Ｐゴシック" charset="0"/>
                 <a:cs typeface="ＭＳ Ｐゴシック" charset="0"/>
@@ -23449,6 +23393,9 @@
             </a:r>
             <a:r>
               <a:rPr lang="en-US" sz="1800" i="1" kern="1200" dirty="0">
+                <a:solidFill>
+                  <a:schemeClr val="tx1"/>
+                </a:solidFill>
                 <a:latin typeface="Calibri" panose="020F0502020204030204"/>
                 <a:ea typeface="ＭＳ Ｐゴシック" charset="0"/>
                 <a:cs typeface="ＭＳ Ｐゴシック" charset="0"/>
@@ -23551,90 +23498,315 @@
       </p:sp>
       <p:sp>
         <p:nvSpPr>
-          <p:cNvPr id="10" name="TextBox 9">
+          <p:cNvPr id="8" name="Slide Number Placeholder 3">
             <a:extLst>
               <a:ext uri="{FF2B5EF4-FFF2-40B4-BE49-F238E27FC236}">
-                <a16:creationId xmlns:a16="http://schemas.microsoft.com/office/drawing/2014/main" id="{1E28A315-E06F-7067-763F-5162A92F118B}"/>
+                <a16:creationId xmlns:a16="http://schemas.microsoft.com/office/drawing/2014/main" id="{52051D34-E511-DC25-4D7F-8A9B323C6554}"/>
               </a:ext>
             </a:extLst>
           </p:cNvPr>
-          <p:cNvSpPr txBox="1"/>
+          <p:cNvSpPr txBox="1">
+            <a:spLocks/>
+          </p:cNvSpPr>
           <p:nvPr/>
         </p:nvSpPr>
         <p:spPr>
           <a:xfrm>
-            <a:off x="34756" y="1439199"/>
-            <a:ext cx="2372098" cy="954107"/>
+            <a:off x="8505650" y="4705519"/>
+            <a:ext cx="548700" cy="299201"/>
           </a:xfrm>
           <a:prstGeom prst="rect">
             <a:avLst/>
           </a:prstGeom>
-          <a:solidFill>
-            <a:schemeClr val="bg1">
-              <a:lumMod val="85000"/>
-            </a:schemeClr>
-          </a:solidFill>
         </p:spPr>
-        <p:style>
-          <a:lnRef idx="1">
-            <a:schemeClr val="dk1"/>
-          </a:lnRef>
-          <a:fillRef idx="2">
-            <a:schemeClr val="dk1"/>
-          </a:fillRef>
-          <a:effectRef idx="1">
-            <a:schemeClr val="dk1"/>
-          </a:effectRef>
-          <a:fontRef idx="minor">
-            <a:schemeClr val="dk1"/>
-          </a:fontRef>
-        </p:style>
         <p:txBody>
-          <a:bodyPr wrap="square">
-            <a:spAutoFit/>
-          </a:bodyPr>
+          <a:bodyPr/>
+          <a:lstStyle>
+            <a:defPPr marR="0" lvl="0" algn="l" rtl="0">
+              <a:lnSpc>
+                <a:spcPct val="100000"/>
+              </a:lnSpc>
+              <a:spcBef>
+                <a:spcPts val="0"/>
+              </a:spcBef>
+              <a:spcAft>
+                <a:spcPts val="0"/>
+              </a:spcAft>
+            </a:defPPr>
+            <a:lvl1pPr marR="0" lvl="0" algn="l" rtl="0">
+              <a:lnSpc>
+                <a:spcPct val="100000"/>
+              </a:lnSpc>
+              <a:spcBef>
+                <a:spcPts val="0"/>
+              </a:spcBef>
+              <a:spcAft>
+                <a:spcPts val="0"/>
+              </a:spcAft>
+              <a:buClr>
+                <a:srgbClr val="000000"/>
+              </a:buClr>
+              <a:buFont typeface="Arial"/>
+              <a:defRPr sz="1400" b="0" i="0" u="none" strike="noStrike" cap="none">
+                <a:solidFill>
+                  <a:srgbClr val="000000"/>
+                </a:solidFill>
+                <a:latin typeface="Arial"/>
+                <a:ea typeface="Arial"/>
+                <a:cs typeface="Arial"/>
+                <a:sym typeface="Arial"/>
+              </a:defRPr>
+            </a:lvl1pPr>
+            <a:lvl2pPr marR="0" lvl="1" algn="l" rtl="0">
+              <a:lnSpc>
+                <a:spcPct val="100000"/>
+              </a:lnSpc>
+              <a:spcBef>
+                <a:spcPts val="0"/>
+              </a:spcBef>
+              <a:spcAft>
+                <a:spcPts val="0"/>
+              </a:spcAft>
+              <a:buClr>
+                <a:srgbClr val="000000"/>
+              </a:buClr>
+              <a:buFont typeface="Arial"/>
+              <a:defRPr sz="1400" b="0" i="0" u="none" strike="noStrike" cap="none">
+                <a:solidFill>
+                  <a:srgbClr val="000000"/>
+                </a:solidFill>
+                <a:latin typeface="Arial"/>
+                <a:ea typeface="Arial"/>
+                <a:cs typeface="Arial"/>
+                <a:sym typeface="Arial"/>
+              </a:defRPr>
+            </a:lvl2pPr>
+            <a:lvl3pPr marR="0" lvl="2" algn="l" rtl="0">
+              <a:lnSpc>
+                <a:spcPct val="100000"/>
+              </a:lnSpc>
+              <a:spcBef>
+                <a:spcPts val="0"/>
+              </a:spcBef>
+              <a:spcAft>
+                <a:spcPts val="0"/>
+              </a:spcAft>
+              <a:buClr>
+                <a:srgbClr val="000000"/>
+              </a:buClr>
+              <a:buFont typeface="Arial"/>
+              <a:defRPr sz="1400" b="0" i="0" u="none" strike="noStrike" cap="none">
+                <a:solidFill>
+                  <a:srgbClr val="000000"/>
+                </a:solidFill>
+                <a:latin typeface="Arial"/>
+                <a:ea typeface="Arial"/>
+                <a:cs typeface="Arial"/>
+                <a:sym typeface="Arial"/>
+              </a:defRPr>
+            </a:lvl3pPr>
+            <a:lvl4pPr marR="0" lvl="3" algn="l" rtl="0">
+              <a:lnSpc>
+                <a:spcPct val="100000"/>
+              </a:lnSpc>
+              <a:spcBef>
+                <a:spcPts val="0"/>
+              </a:spcBef>
+              <a:spcAft>
+                <a:spcPts val="0"/>
+              </a:spcAft>
+              <a:buClr>
+                <a:srgbClr val="000000"/>
+              </a:buClr>
+              <a:buFont typeface="Arial"/>
+              <a:defRPr sz="1400" b="0" i="0" u="none" strike="noStrike" cap="none">
+                <a:solidFill>
+                  <a:srgbClr val="000000"/>
+                </a:solidFill>
+                <a:latin typeface="Arial"/>
+                <a:ea typeface="Arial"/>
+                <a:cs typeface="Arial"/>
+                <a:sym typeface="Arial"/>
+              </a:defRPr>
+            </a:lvl4pPr>
+            <a:lvl5pPr marR="0" lvl="4" algn="l" rtl="0">
+              <a:lnSpc>
+                <a:spcPct val="100000"/>
+              </a:lnSpc>
+              <a:spcBef>
+                <a:spcPts val="0"/>
+              </a:spcBef>
+              <a:spcAft>
+                <a:spcPts val="0"/>
+              </a:spcAft>
+              <a:buClr>
+                <a:srgbClr val="000000"/>
+              </a:buClr>
+              <a:buFont typeface="Arial"/>
+              <a:defRPr sz="1400" b="0" i="0" u="none" strike="noStrike" cap="none">
+                <a:solidFill>
+                  <a:srgbClr val="000000"/>
+                </a:solidFill>
+                <a:latin typeface="Arial"/>
+                <a:ea typeface="Arial"/>
+                <a:cs typeface="Arial"/>
+                <a:sym typeface="Arial"/>
+              </a:defRPr>
+            </a:lvl5pPr>
+            <a:lvl6pPr marR="0" lvl="5" algn="l" rtl="0">
+              <a:lnSpc>
+                <a:spcPct val="100000"/>
+              </a:lnSpc>
+              <a:spcBef>
+                <a:spcPts val="0"/>
+              </a:spcBef>
+              <a:spcAft>
+                <a:spcPts val="0"/>
+              </a:spcAft>
+              <a:buClr>
+                <a:srgbClr val="000000"/>
+              </a:buClr>
+              <a:buFont typeface="Arial"/>
+              <a:defRPr sz="1400" b="0" i="0" u="none" strike="noStrike" cap="none">
+                <a:solidFill>
+                  <a:srgbClr val="000000"/>
+                </a:solidFill>
+                <a:latin typeface="Arial"/>
+                <a:ea typeface="Arial"/>
+                <a:cs typeface="Arial"/>
+                <a:sym typeface="Arial"/>
+              </a:defRPr>
+            </a:lvl6pPr>
+            <a:lvl7pPr marR="0" lvl="6" algn="l" rtl="0">
+              <a:lnSpc>
+                <a:spcPct val="100000"/>
+              </a:lnSpc>
+              <a:spcBef>
+                <a:spcPts val="0"/>
+              </a:spcBef>
+              <a:spcAft>
+                <a:spcPts val="0"/>
+              </a:spcAft>
+              <a:buClr>
+                <a:srgbClr val="000000"/>
+              </a:buClr>
+              <a:buFont typeface="Arial"/>
+              <a:defRPr sz="1400" b="0" i="0" u="none" strike="noStrike" cap="none">
+                <a:solidFill>
+                  <a:srgbClr val="000000"/>
+                </a:solidFill>
+                <a:latin typeface="Arial"/>
+                <a:ea typeface="Arial"/>
+                <a:cs typeface="Arial"/>
+                <a:sym typeface="Arial"/>
+              </a:defRPr>
+            </a:lvl7pPr>
+            <a:lvl8pPr marR="0" lvl="7" algn="l" rtl="0">
+              <a:lnSpc>
+                <a:spcPct val="100000"/>
+              </a:lnSpc>
+              <a:spcBef>
+                <a:spcPts val="0"/>
+              </a:spcBef>
+              <a:spcAft>
+                <a:spcPts val="0"/>
+              </a:spcAft>
+              <a:buClr>
+                <a:srgbClr val="000000"/>
+              </a:buClr>
+              <a:buFont typeface="Arial"/>
+              <a:defRPr sz="1400" b="0" i="0" u="none" strike="noStrike" cap="none">
+                <a:solidFill>
+                  <a:srgbClr val="000000"/>
+                </a:solidFill>
+                <a:latin typeface="Arial"/>
+                <a:ea typeface="Arial"/>
+                <a:cs typeface="Arial"/>
+                <a:sym typeface="Arial"/>
+              </a:defRPr>
+            </a:lvl8pPr>
+            <a:lvl9pPr marR="0" lvl="8" algn="l" rtl="0">
+              <a:lnSpc>
+                <a:spcPct val="100000"/>
+              </a:lnSpc>
+              <a:spcBef>
+                <a:spcPts val="0"/>
+              </a:spcBef>
+              <a:spcAft>
+                <a:spcPts val="0"/>
+              </a:spcAft>
+              <a:buClr>
+                <a:srgbClr val="000000"/>
+              </a:buClr>
+              <a:buFont typeface="Arial"/>
+              <a:defRPr sz="1400" b="0" i="0" u="none" strike="noStrike" cap="none">
+                <a:solidFill>
+                  <a:srgbClr val="000000"/>
+                </a:solidFill>
+                <a:latin typeface="Arial"/>
+                <a:ea typeface="Arial"/>
+                <a:cs typeface="Arial"/>
+                <a:sym typeface="Arial"/>
+              </a:defRPr>
+            </a:lvl9pPr>
+          </a:lstStyle>
+          <a:p>
+            <a:pPr algn="r"/>
+            <a:fld id="{00000000-1234-1234-1234-123412341234}" type="slidenum">
+              <a:rPr lang="en" sz="1000" smtClean="0">
+                <a:latin typeface="Roboto" panose="02000000000000000000" pitchFamily="2" charset="0"/>
+                <a:ea typeface="Roboto" panose="02000000000000000000" pitchFamily="2" charset="0"/>
+                <a:cs typeface="Roboto" panose="02000000000000000000" pitchFamily="2" charset="0"/>
+              </a:rPr>
+              <a:pPr algn="r"/>
+              <a:t>2</a:t>
+            </a:fld>
+            <a:endParaRPr lang="en" sz="1000" dirty="0">
+              <a:latin typeface="Roboto" panose="02000000000000000000" pitchFamily="2" charset="0"/>
+              <a:ea typeface="Roboto" panose="02000000000000000000" pitchFamily="2" charset="0"/>
+              <a:cs typeface="Roboto" panose="02000000000000000000" pitchFamily="2" charset="0"/>
+            </a:endParaRPr>
+          </a:p>
+        </p:txBody>
+      </p:sp>
+      <p:sp>
+        <p:nvSpPr>
+          <p:cNvPr id="3" name="Slide Number Placeholder 2">
+            <a:extLst>
+              <a:ext uri="{FF2B5EF4-FFF2-40B4-BE49-F238E27FC236}">
+                <a16:creationId xmlns:a16="http://schemas.microsoft.com/office/drawing/2014/main" id="{482204F9-FA59-AF69-AA07-CD0652608D6A}"/>
+              </a:ext>
+            </a:extLst>
+          </p:cNvPr>
+          <p:cNvSpPr>
+            <a:spLocks noGrp="1"/>
+          </p:cNvSpPr>
+          <p:nvPr>
+            <p:ph type="sldNum" sz="quarter" idx="4"/>
+          </p:nvPr>
+        </p:nvSpPr>
+        <p:spPr/>
+        <p:txBody>
+          <a:bodyPr/>
           <a:lstStyle/>
           <a:p>
             <a:r>
-              <a:rPr lang="en-US" kern="1200" dirty="0">
-                <a:solidFill>
-                  <a:schemeClr val="tx1"/>
-                </a:solidFill>
-                <a:latin typeface="Calibri" panose="020F0502020204030204"/>
-                <a:ea typeface="+mn-ea"/>
-                <a:cs typeface="+mn-cs"/>
-              </a:rPr>
-              <a:t>The </a:t>
+              <a:rPr lang="en-US"/>
+              <a:t>Introduction: 1-</a:t>
             </a:r>
-            <a:r>
-              <a:rPr kumimoji="0" lang="en-US" sz="1400" b="0" i="0" u="none" strike="noStrike" kern="1200" cap="none" spc="0" normalizeH="0" baseline="0" noProof="0" dirty="0">
-                <a:ln>
-                  <a:noFill/>
-                </a:ln>
-                <a:solidFill>
-                  <a:schemeClr val="tx1"/>
-                </a:solidFill>
-                <a:effectLst/>
-                <a:uLnTx/>
-                <a:uFillTx/>
-                <a:latin typeface="Calibri" panose="020F0502020204030204"/>
-                <a:ea typeface="+mn-ea"/>
-                <a:cs typeface="+mn-cs"/>
-              </a:rPr>
-              <a:t>nodal processing delay (check bit errors, determine output link) is typically very small and can be ignored</a:t>
-            </a:r>
-            <a:endParaRPr lang="en-US" dirty="0">
-              <a:solidFill>
-                <a:schemeClr val="tx1"/>
-              </a:solidFill>
-            </a:endParaRPr>
+            <a:fld id="{C4204591-24BD-A542-B9D5-F8D8A88D2FEE}" type="slidenum">
+              <a:rPr lang="en-US" smtClean="0"/>
+              <a:pPr/>
+              <a:t>2</a:t>
+            </a:fld>
+            <a:endParaRPr lang="en-US" dirty="0"/>
           </a:p>
         </p:txBody>
       </p:sp>
     </p:spTree>
     <p:extLst>
       <p:ext uri="{BB962C8B-B14F-4D97-AF65-F5344CB8AC3E}">
-        <p14:creationId xmlns:p14="http://schemas.microsoft.com/office/powerpoint/2010/main" val="453457216"/>
+        <p14:creationId xmlns:p14="http://schemas.microsoft.com/office/powerpoint/2010/main" val="1252970958"/>
       </p:ext>
     </p:extLst>
   </p:cSld>
@@ -24163,8 +24335,8 @@
           </a:p>
         </p:txBody>
       </p:sp>
-      <mc:AlternateContent xmlns:mc="http://schemas.openxmlformats.org/markup-compatibility/2006">
-        <mc:Choice xmlns:p14="http://schemas.microsoft.com/office/powerpoint/2010/main" Requires="p14">
+      <mc:AlternateContent xmlns:mc="http://schemas.openxmlformats.org/markup-compatibility/2006" xmlns:p14="http://schemas.microsoft.com/office/powerpoint/2010/main">
+        <mc:Choice Requires="p14">
           <p:contentPart p14:bwMode="auto" r:id="rId2">
             <p14:nvContentPartPr>
               <p14:cNvPr id="4" name="Ink 3">
@@ -24183,7 +24355,7 @@
             </p14:xfrm>
           </p:contentPart>
         </mc:Choice>
-        <mc:Fallback>
+        <mc:Fallback xmlns="">
           <p:pic>
             <p:nvPicPr>
               <p:cNvPr id="4" name="Ink 3">
